--- a/02_HSE_Presentation_Shablon.pptx
+++ b/02_HSE_Presentation_Shablon.pptx
@@ -30112,7 +30112,7 @@
             </a:pPr>
             <a:r>
               <a:rPr lang="ru-RU" dirty="0"/>
-              <a:t>Использования модели кластеризации для более эффективной работы с объектами</a:t>
+              <a:t>Использования модели кластеризации для персонализации рекомендаций собственникам объектов</a:t>
             </a:r>
           </a:p>
           <a:p>
@@ -30749,7 +30749,7 @@
         </p:nvSpPr>
         <p:spPr>
           <a:xfrm>
-            <a:off x="375454" y="2416707"/>
+            <a:off x="1052225" y="2224815"/>
             <a:ext cx="2413012" cy="1854024"/>
           </a:xfrm>
           <a:prstGeom prst="ellipse">
@@ -30807,7 +30807,7 @@
         </p:nvSpPr>
         <p:spPr>
           <a:xfrm>
-            <a:off x="2767031" y="4577351"/>
+            <a:off x="4430369" y="2234327"/>
             <a:ext cx="2413012" cy="1854024"/>
           </a:xfrm>
           <a:prstGeom prst="ellipse">
@@ -30837,7 +30837,7 @@
             <a:pPr algn="ctr"/>
             <a:r>
               <a:rPr lang="ru-RU" dirty="0"/>
-              <a:t>Платформа подбирает коммуникации на основании кластеров</a:t>
+              <a:t>Персональные рекомендации</a:t>
             </a:r>
             <a:endParaRPr lang="en-US" dirty="0"/>
           </a:p>
@@ -30854,18 +30854,20 @@
           </p:cNvPr>
           <p:cNvCxnSpPr>
             <a:cxnSpLocks/>
-            <a:stCxn id="9" idx="4"/>
+            <a:stCxn id="9" idx="6"/>
             <a:endCxn id="11" idx="2"/>
           </p:cNvCxnSpPr>
           <p:nvPr/>
         </p:nvCxnSpPr>
         <p:spPr>
-          <a:xfrm rot="16200000" flipH="1">
-            <a:off x="1557679" y="4295011"/>
-            <a:ext cx="1233632" cy="1185071"/>
+          <a:xfrm>
+            <a:off x="3465237" y="3151827"/>
+            <a:ext cx="965132" cy="9512"/>
           </a:xfrm>
-          <a:prstGeom prst="curvedConnector2">
-            <a:avLst/>
+          <a:prstGeom prst="curvedConnector3">
+            <a:avLst>
+              <a:gd name="adj1" fmla="val 50000"/>
+            </a:avLst>
           </a:prstGeom>
           <a:ln w="28575">
             <a:tailEnd type="triangle"/>
@@ -30897,21 +30899,18 @@
           </p:cNvPr>
           <p:cNvCxnSpPr>
             <a:cxnSpLocks/>
-            <a:stCxn id="11" idx="0"/>
-            <a:endCxn id="27" idx="2"/>
+            <a:stCxn id="11" idx="6"/>
+            <a:endCxn id="20" idx="0"/>
           </p:cNvCxnSpPr>
           <p:nvPr/>
         </p:nvCxnSpPr>
         <p:spPr>
-          <a:xfrm rot="16200000" flipV="1">
-            <a:off x="3315466" y="3919279"/>
-            <a:ext cx="1189487" cy="126657"/>
+          <a:xfrm>
+            <a:off x="6843381" y="3161339"/>
+            <a:ext cx="883112" cy="1422834"/>
           </a:xfrm>
-          <a:prstGeom prst="curvedConnector4">
-            <a:avLst>
-              <a:gd name="adj1" fmla="val 11033"/>
-              <a:gd name="adj2" fmla="val 1133065"/>
-            </a:avLst>
+          <a:prstGeom prst="curvedConnector2">
+            <a:avLst/>
           </a:prstGeom>
           <a:ln w="28575">
             <a:tailEnd type="triangle"/>
@@ -31032,101 +31031,6 @@
           </a:p>
         </p:txBody>
       </p:sp>
-      <p:sp>
-        <p:nvSpPr>
-          <p:cNvPr id="27" name="Oval 26">
-            <a:extLst>
-              <a:ext uri="{FF2B5EF4-FFF2-40B4-BE49-F238E27FC236}">
-                <a16:creationId xmlns:a16="http://schemas.microsoft.com/office/drawing/2014/main" id="{27F62D89-04FD-FE2A-8C2C-97BD5489D3CC}"/>
-              </a:ext>
-            </a:extLst>
-          </p:cNvPr>
-          <p:cNvSpPr/>
-          <p:nvPr/>
-        </p:nvSpPr>
-        <p:spPr>
-          <a:xfrm>
-            <a:off x="3846880" y="2460852"/>
-            <a:ext cx="2413012" cy="1854024"/>
-          </a:xfrm>
-          <a:prstGeom prst="ellipse">
-            <a:avLst/>
-          </a:prstGeom>
-        </p:spPr>
-        <p:style>
-          <a:lnRef idx="2">
-            <a:schemeClr val="accent1">
-              <a:shade val="15000"/>
-            </a:schemeClr>
-          </a:lnRef>
-          <a:fillRef idx="1">
-            <a:schemeClr val="accent1"/>
-          </a:fillRef>
-          <a:effectRef idx="0">
-            <a:schemeClr val="accent1"/>
-          </a:effectRef>
-          <a:fontRef idx="minor">
-            <a:schemeClr val="lt1"/>
-          </a:fontRef>
-        </p:style>
-        <p:txBody>
-          <a:bodyPr rtlCol="0" anchor="ctr"/>
-          <a:lstStyle/>
-          <a:p>
-            <a:pPr algn="ctr"/>
-            <a:r>
-              <a:rPr lang="ru-RU" dirty="0"/>
-              <a:t>Коммуникации эффективнее</a:t>
-            </a:r>
-            <a:endParaRPr lang="en-US" dirty="0"/>
-          </a:p>
-        </p:txBody>
-      </p:sp>
-      <p:cxnSp>
-        <p:nvCxnSpPr>
-          <p:cNvPr id="42" name="Connector: Curved 41">
-            <a:extLst>
-              <a:ext uri="{FF2B5EF4-FFF2-40B4-BE49-F238E27FC236}">
-                <a16:creationId xmlns:a16="http://schemas.microsoft.com/office/drawing/2014/main" id="{02D01DAD-FDD2-4D09-4668-801D897EE330}"/>
-              </a:ext>
-            </a:extLst>
-          </p:cNvPr>
-          <p:cNvCxnSpPr>
-            <a:cxnSpLocks/>
-            <a:stCxn id="27" idx="6"/>
-            <a:endCxn id="20" idx="2"/>
-          </p:cNvCxnSpPr>
-          <p:nvPr/>
-        </p:nvCxnSpPr>
-        <p:spPr>
-          <a:xfrm>
-            <a:off x="6259892" y="3387864"/>
-            <a:ext cx="260095" cy="2123321"/>
-          </a:xfrm>
-          <a:prstGeom prst="curvedConnector3">
-            <a:avLst>
-              <a:gd name="adj1" fmla="val 50000"/>
-            </a:avLst>
-          </a:prstGeom>
-          <a:ln w="28575">
-            <a:tailEnd type="triangle"/>
-          </a:ln>
-        </p:spPr>
-        <p:style>
-          <a:lnRef idx="1">
-            <a:schemeClr val="accent1"/>
-          </a:lnRef>
-          <a:fillRef idx="0">
-            <a:schemeClr val="accent1"/>
-          </a:fillRef>
-          <a:effectRef idx="0">
-            <a:schemeClr val="accent1"/>
-          </a:effectRef>
-          <a:fontRef idx="minor">
-            <a:schemeClr val="tx1"/>
-          </a:fontRef>
-        </p:style>
-      </p:cxnSp>
       <p:cxnSp>
         <p:nvCxnSpPr>
           <p:cNvPr id="63" name="Connector: Curved 62">
@@ -31231,7 +31135,7 @@
         </p:nvSpPr>
         <p:spPr>
           <a:xfrm>
-            <a:off x="0" y="5003976"/>
+            <a:off x="-154281" y="4947220"/>
             <a:ext cx="2413012" cy="1854024"/>
           </a:xfrm>
           <a:prstGeom prst="ellipse">
@@ -31287,9 +31191,9 @@
           <p:nvPr/>
         </p:nvCxnSpPr>
         <p:spPr>
-          <a:xfrm rot="16200000" flipV="1">
-            <a:off x="465289" y="4262758"/>
-            <a:ext cx="1004761" cy="477675"/>
+          <a:xfrm rot="5400000" flipH="1" flipV="1">
+            <a:off x="658965" y="4200584"/>
+            <a:ext cx="1139897" cy="353377"/>
           </a:xfrm>
           <a:prstGeom prst="curvedConnector3">
             <a:avLst>
@@ -33910,18 +33814,18 @@
 </file>
 
 <file path=customXml/item2.xml><?xml version="1.0" encoding="utf-8"?>
+<p:properties xmlns:p="http://schemas.microsoft.com/office/2006/metadata/properties" xmlns:xsi="http://www.w3.org/2001/XMLSchema-instance" xmlns:pc="http://schemas.microsoft.com/office/infopath/2007/PartnerControls">
+  <documentManagement/>
+</p:properties>
+</file>
+
+<file path=customXml/item3.xml><?xml version="1.0" encoding="utf-8"?>
 <?mso-contentType ?>
 <FormTemplates xmlns="http://schemas.microsoft.com/sharepoint/v3/contenttype/forms">
   <Display>DocumentLibraryForm</Display>
   <Edit>DocumentLibraryForm</Edit>
   <New>DocumentLibraryForm</New>
 </FormTemplates>
-</file>
-
-<file path=customXml/item3.xml><?xml version="1.0" encoding="utf-8"?>
-<p:properties xmlns:p="http://schemas.microsoft.com/office/2006/metadata/properties" xmlns:xsi="http://www.w3.org/2001/XMLSchema-instance" xmlns:pc="http://schemas.microsoft.com/office/infopath/2007/PartnerControls">
-  <documentManagement/>
-</p:properties>
 </file>
 
 <file path=customXml/itemProps1.xml><?xml version="1.0" encoding="utf-8"?>
@@ -33944,14 +33848,6 @@
 </file>
 
 <file path=customXml/itemProps2.xml><?xml version="1.0" encoding="utf-8"?>
-<ds:datastoreItem xmlns:ds="http://schemas.openxmlformats.org/officeDocument/2006/customXml" ds:itemID="{B34386AA-1848-4C75-B336-1053927CB025}">
-  <ds:schemaRefs>
-    <ds:schemaRef ds:uri="http://schemas.microsoft.com/sharepoint/v3/contenttype/forms"/>
-  </ds:schemaRefs>
-</ds:datastoreItem>
-</file>
-
-<file path=customXml/itemProps3.xml><?xml version="1.0" encoding="utf-8"?>
 <ds:datastoreItem xmlns:ds="http://schemas.openxmlformats.org/officeDocument/2006/customXml" ds:itemID="{433DAF31-D8A6-49A0-9A5D-8B2EA5B1C511}">
   <ds:schemaRefs>
     <ds:schemaRef ds:uri="http://purl.org/dc/elements/1.1/"/>
@@ -33966,4 +33862,12 @@
     <ds:schemaRef ds:uri="9875bd71-cde8-496c-a136-433f55d5e6d0"/>
   </ds:schemaRefs>
 </ds:datastoreItem>
+</file>
+
+<file path=customXml/itemProps3.xml><?xml version="1.0" encoding="utf-8"?>
+<ds:datastoreItem xmlns:ds="http://schemas.openxmlformats.org/officeDocument/2006/customXml" ds:itemID="{B34386AA-1848-4C75-B336-1053927CB025}">
+  <ds:schemaRefs>
+    <ds:schemaRef ds:uri="http://schemas.microsoft.com/sharepoint/v3/contenttype/forms"/>
+  </ds:schemaRefs>
+</ds:datastoreItem>
 </file>